--- a/Tuan 2/bao-cao-tuan-2.pptx
+++ b/Tuan 2/bao-cao-tuan-2.pptx
@@ -4498,12 +4498,22 @@
           <a:bodyPr wrap="square" lIns="0" tIns="0" rIns="0" bIns="0" rtlCol="0" anchor="t"/>
           <a:lstStyle/>
           <a:p>
-            <a:pPr marL="0" indent="0">
+            <a:pPr>
               <a:lnSpc>
                 <a:spcPct val="95000"/>
               </a:lnSpc>
-              <a:buNone/>
-            </a:pPr>
+            </a:pPr>
+            <a:r>
+              <a:rPr lang="en-US" sz="1150" dirty="0" err="1">
+                <a:solidFill>
+                  <a:srgbClr val="4A4E63"/>
+                </a:solidFill>
+                <a:latin typeface="Calibri" pitchFamily="34" charset="0"/>
+                <a:ea typeface="Calibri" pitchFamily="34" charset="-122"/>
+                <a:cs typeface="Calibri" pitchFamily="34" charset="-120"/>
+              </a:rPr>
+              <a:t>SimpleSearch</a:t>
+            </a:r>
             <a:r>
               <a:rPr lang="en-US" sz="1150" dirty="0">
                 <a:solidFill>
@@ -4513,7 +4523,161 @@
                 <a:ea typeface="Calibri" pitchFamily="34" charset="-122"/>
                 <a:cs typeface="Calibri" pitchFamily="34" charset="-120"/>
               </a:rPr>
-              <a:t>no-memory — trả lời chỉ từ câu hỏi, không có lịch sử: bao nhiêu câu đoán được mà chẳng cần nhớ gì. random-k — truy xuất k ký ức ngẫu nhiên: nếu hệ không hơn hẳn thì truy xuất không hoạt động, chỉ là mô hình giỏi.</a:t>
+              <a:t>: Baseline </a:t>
+            </a:r>
+            <a:r>
+              <a:rPr lang="en-US" sz="1150" dirty="0" err="1">
+                <a:solidFill>
+                  <a:srgbClr val="4A4E63"/>
+                </a:solidFill>
+                <a:latin typeface="Calibri" pitchFamily="34" charset="0"/>
+                <a:ea typeface="Calibri" pitchFamily="34" charset="-122"/>
+                <a:cs typeface="Calibri" pitchFamily="34" charset="-120"/>
+              </a:rPr>
+              <a:t>của</a:t>
+            </a:r>
+            <a:r>
+              <a:rPr lang="en-US" sz="1150" dirty="0">
+                <a:solidFill>
+                  <a:srgbClr val="4A4E63"/>
+                </a:solidFill>
+                <a:latin typeface="Calibri" pitchFamily="34" charset="0"/>
+                <a:ea typeface="Calibri" pitchFamily="34" charset="-122"/>
+                <a:cs typeface="Calibri" pitchFamily="34" charset="-120"/>
+              </a:rPr>
+              <a:t> </a:t>
+            </a:r>
+            <a:r>
+              <a:rPr lang="en-US" sz="1150" dirty="0" err="1">
+                <a:solidFill>
+                  <a:srgbClr val="4A4E63"/>
+                </a:solidFill>
+                <a:latin typeface="Calibri" pitchFamily="34" charset="0"/>
+                <a:ea typeface="Calibri" pitchFamily="34" charset="-122"/>
+                <a:cs typeface="Calibri" pitchFamily="34" charset="-120"/>
+              </a:rPr>
+              <a:t>bộ</a:t>
+            </a:r>
+            <a:r>
+              <a:rPr lang="en-US" sz="1150" dirty="0">
+                <a:solidFill>
+                  <a:srgbClr val="4A4E63"/>
+                </a:solidFill>
+                <a:latin typeface="Calibri" pitchFamily="34" charset="0"/>
+                <a:ea typeface="Calibri" pitchFamily="34" charset="-122"/>
+                <a:cs typeface="Calibri" pitchFamily="34" charset="-120"/>
+              </a:rPr>
+              <a:t> </a:t>
+            </a:r>
+            <a:r>
+              <a:rPr lang="en-US" sz="1150" dirty="0" err="1">
+                <a:solidFill>
+                  <a:srgbClr val="4A4E63"/>
+                </a:solidFill>
+                <a:latin typeface="Calibri" pitchFamily="34" charset="0"/>
+                <a:ea typeface="Calibri" pitchFamily="34" charset="-122"/>
+                <a:cs typeface="Calibri" pitchFamily="34" charset="-120"/>
+              </a:rPr>
+              <a:t>LongMemEval</a:t>
+            </a:r>
+            <a:r>
+              <a:rPr lang="en-US" sz="1150" dirty="0">
+                <a:solidFill>
+                  <a:srgbClr val="4A4E63"/>
+                </a:solidFill>
+                <a:latin typeface="Calibri" pitchFamily="34" charset="0"/>
+                <a:ea typeface="Calibri" pitchFamily="34" charset="-122"/>
+                <a:cs typeface="Calibri" pitchFamily="34" charset="-120"/>
+              </a:rPr>
+              <a:t>: </a:t>
+            </a:r>
+            <a:r>
+              <a:rPr lang="en-US" sz="1150" dirty="0" err="1">
+                <a:solidFill>
+                  <a:srgbClr val="4A4E63"/>
+                </a:solidFill>
+                <a:latin typeface="Calibri" pitchFamily="34" charset="0"/>
+                <a:ea typeface="Calibri" pitchFamily="34" charset="-122"/>
+                <a:cs typeface="Calibri" pitchFamily="34" charset="-120"/>
+              </a:rPr>
+              <a:t>nhớ</a:t>
+            </a:r>
+            <a:r>
+              <a:rPr lang="en-US" sz="1150" dirty="0">
+                <a:solidFill>
+                  <a:srgbClr val="4A4E63"/>
+                </a:solidFill>
+                <a:latin typeface="Calibri" pitchFamily="34" charset="0"/>
+                <a:ea typeface="Calibri" pitchFamily="34" charset="-122"/>
+                <a:cs typeface="Calibri" pitchFamily="34" charset="-120"/>
+              </a:rPr>
+              <a:t> 5 </a:t>
+            </a:r>
+            <a:r>
+              <a:rPr lang="en-US" sz="1150" dirty="0" err="1">
+                <a:solidFill>
+                  <a:srgbClr val="4A4E63"/>
+                </a:solidFill>
+                <a:latin typeface="Calibri" pitchFamily="34" charset="0"/>
+                <a:ea typeface="Calibri" pitchFamily="34" charset="-122"/>
+                <a:cs typeface="Calibri" pitchFamily="34" charset="-120"/>
+              </a:rPr>
+              <a:t>phiên</a:t>
+            </a:r>
+            <a:r>
+              <a:rPr lang="en-US" sz="1150" dirty="0">
+                <a:solidFill>
+                  <a:srgbClr val="4A4E63"/>
+                </a:solidFill>
+                <a:latin typeface="Calibri" pitchFamily="34" charset="0"/>
+                <a:ea typeface="Calibri" pitchFamily="34" charset="-122"/>
+                <a:cs typeface="Calibri" pitchFamily="34" charset="-120"/>
+              </a:rPr>
+              <a:t> </a:t>
+            </a:r>
+            <a:r>
+              <a:rPr lang="en-US" sz="1150" dirty="0" err="1">
+                <a:solidFill>
+                  <a:srgbClr val="4A4E63"/>
+                </a:solidFill>
+                <a:latin typeface="Calibri" pitchFamily="34" charset="0"/>
+                <a:ea typeface="Calibri" pitchFamily="34" charset="-122"/>
+                <a:cs typeface="Calibri" pitchFamily="34" charset="-120"/>
+              </a:rPr>
+              <a:t>liên</a:t>
+            </a:r>
+            <a:r>
+              <a:rPr lang="en-US" sz="1150" dirty="0">
+                <a:solidFill>
+                  <a:srgbClr val="4A4E63"/>
+                </a:solidFill>
+                <a:latin typeface="Calibri" pitchFamily="34" charset="0"/>
+                <a:ea typeface="Calibri" pitchFamily="34" charset="-122"/>
+                <a:cs typeface="Calibri" pitchFamily="34" charset="-120"/>
+              </a:rPr>
+              <a:t> </a:t>
+            </a:r>
+            <a:r>
+              <a:rPr lang="en-US" sz="1150" dirty="0" err="1">
+                <a:solidFill>
+                  <a:srgbClr val="4A4E63"/>
+                </a:solidFill>
+                <a:latin typeface="Calibri" pitchFamily="34" charset="0"/>
+                <a:ea typeface="Calibri" pitchFamily="34" charset="-122"/>
+                <a:cs typeface="Calibri" pitchFamily="34" charset="-120"/>
+              </a:rPr>
+              <a:t>quan</a:t>
+            </a:r>
+            <a:r>
+              <a:rPr lang="en-US" sz="1150" dirty="0">
+                <a:solidFill>
+                  <a:srgbClr val="4A4E63"/>
+                </a:solidFill>
+                <a:latin typeface="Calibri" pitchFamily="34" charset="0"/>
+                <a:ea typeface="Calibri" pitchFamily="34" charset="-122"/>
+                <a:cs typeface="Calibri" pitchFamily="34" charset="-120"/>
+              </a:rPr>
+              <a:t>. random-k — truy xuất k ký ức ngẫu nhiên: nếu hệ không hơn hẳn thì truy xuất không hoạt động, chỉ là mô hình giỏi.</a:t>
             </a:r>
             <a:endParaRPr lang="en-US" sz="1150" dirty="0"/>
           </a:p>
@@ -6980,15 +7144,14 @@
               <a:buNone/>
             </a:pPr>
             <a:r>
-              <a:rPr lang="en-US" sz="1150" b="1" dirty="0">
+              <a:rPr lang="en-US" sz="1150" b="1" dirty="0" err="1">
                 <a:solidFill>
                   <a:srgbClr val="13123A"/>
                 </a:solidFill>
                 <a:latin typeface="Courier New" pitchFamily="34" charset="0"/>
-                <a:ea typeface="Courier New" pitchFamily="34" charset="-122"/>
                 <a:cs typeface="Courier New" pitchFamily="34" charset="-120"/>
               </a:rPr>
-              <a:t>no-memory</a:t>
+              <a:t>SimpleSearch</a:t>
             </a:r>
             <a:endParaRPr lang="en-US" sz="1150" dirty="0"/>
           </a:p>
@@ -14298,9 +14461,6 @@
           <a:bodyPr wrap="square" lIns="0" tIns="0" rIns="0" bIns="0" rtlCol="0" anchor="ctr"/>
           <a:lstStyle/>
           <a:p>
-            <a:pPr marL="0" indent="0">
-              <a:buNone/>
-            </a:pPr>
             <a:r>
               <a:rPr lang="en-US" sz="1100" b="1" dirty="0">
                 <a:solidFill>
@@ -18139,7 +18299,7 @@
                 <a:ea typeface="Cambria" pitchFamily="34" charset="-122"/>
                 <a:cs typeface="Cambria" pitchFamily="34" charset="-120"/>
               </a:rPr>
-              <a:t>Xử lý song ngữ Việt – Anh</a:t>
+              <a:t>Xử lý song ngữ Việt – Anh(Optional)</a:t>
             </a:r>
             <a:endParaRPr lang="en-US" sz="3000" dirty="0"/>
           </a:p>
@@ -21552,7 +21712,29 @@
                 <a:ea typeface="Cambria" pitchFamily="34" charset="-122"/>
                 <a:cs typeface="Cambria" pitchFamily="34" charset="-120"/>
               </a:rPr>
-              <a:t>Vòng lặp xử lý một lượt hội thoại</a:t>
+              <a:t>Pipeline </a:t>
+            </a:r>
+            <a:r>
+              <a:rPr lang="en-US" sz="3000" b="1" dirty="0" err="1">
+                <a:solidFill>
+                  <a:srgbClr val="13123A"/>
+                </a:solidFill>
+                <a:latin typeface="Cambria" pitchFamily="34" charset="0"/>
+                <a:ea typeface="Cambria" pitchFamily="34" charset="-122"/>
+                <a:cs typeface="Cambria" pitchFamily="34" charset="-120"/>
+              </a:rPr>
+              <a:t>xử</a:t>
+            </a:r>
+            <a:r>
+              <a:rPr lang="en-US" sz="3000" b="1" dirty="0">
+                <a:solidFill>
+                  <a:srgbClr val="13123A"/>
+                </a:solidFill>
+                <a:latin typeface="Cambria" pitchFamily="34" charset="0"/>
+                <a:ea typeface="Cambria" pitchFamily="34" charset="-122"/>
+                <a:cs typeface="Cambria" pitchFamily="34" charset="-120"/>
+              </a:rPr>
+              <a:t> lý một lượt hội thoại</a:t>
             </a:r>
             <a:endParaRPr lang="en-US" sz="3000" dirty="0"/>
           </a:p>
